--- a/slides/20260709_progress_v2/研究進捗_20260709_v2.pptx
+++ b/slides/20260709_progress_v2/研究進捗_20260709_v2.pptx
@@ -14404,7 +14404,7 @@
                 <a:ea typeface="GenEi M Gothic v2 Regular"/>
                 <a:cs typeface="GenEi M Gothic v2 Regular"/>
               </a:rPr>
-              <a:t>1/4 は入る。1/13 も 0.00202…(3進) と展開でき、足し合わせると確かに 1/13。だから入る</a:t>
+              <a:t>1/4 は入る。1/13 も 0.002002…(3進) と展開でき、足し合わせると確かに 1/13。だから入る</a:t>
             </a:r>
           </a:p>
           <a:p>
@@ -15974,7 +15974,7 @@
                 <a:ea typeface="GenEi M Gothic v2 Regular"/>
                 <a:cs typeface="GenEi M Gothic v2 Regular"/>
               </a:rPr>
-              <a:t>さっきの3進展開は誤り。正しくは 0.00202… で “1” を含まない。H に変える</a:t>
+              <a:t>さっきの3進展開は誤り。正しくは 0.002002… で “1” を含まない。H に変える</a:t>
             </a:r>
           </a:p>
         </p:txBody>
@@ -30588,7 +30588,7 @@
         <p:spPr>
           <a:xfrm>
             <a:off x="868680" y="1965960"/>
-            <a:ext cx="3200400" cy="603504"/>
+            <a:ext cx="3108960" cy="603504"/>
           </a:xfrm>
           <a:prstGeom prst="rect">
             <a:avLst/>
@@ -30634,7 +30634,7 @@
         <p:spPr>
           <a:xfrm>
             <a:off x="996695" y="1965960"/>
-            <a:ext cx="2980944" cy="603504"/>
+            <a:ext cx="2889504" cy="603504"/>
           </a:xfrm>
           <a:prstGeom prst="rect">
             <a:avLst/>
@@ -30680,8 +30680,8 @@
         </p:nvSpPr>
         <p:spPr>
           <a:xfrm>
-            <a:off x="4069080" y="1965960"/>
-            <a:ext cx="1737360" cy="603504"/>
+            <a:off x="3977639" y="1965960"/>
+            <a:ext cx="1645920" cy="603504"/>
           </a:xfrm>
           <a:prstGeom prst="rect">
             <a:avLst/>
@@ -30726,8 +30726,8 @@
         </p:nvSpPr>
         <p:spPr>
           <a:xfrm>
-            <a:off x="4197096" y="1965960"/>
-            <a:ext cx="1517904" cy="603504"/>
+            <a:off x="4105655" y="1965960"/>
+            <a:ext cx="1426464" cy="603504"/>
           </a:xfrm>
           <a:prstGeom prst="rect">
             <a:avLst/>
@@ -30773,8 +30773,8 @@
         </p:nvSpPr>
         <p:spPr>
           <a:xfrm>
-            <a:off x="5806440" y="1965960"/>
-            <a:ext cx="1554480" cy="603504"/>
+            <a:off x="5623559" y="1965960"/>
+            <a:ext cx="1463040" cy="603504"/>
           </a:xfrm>
           <a:prstGeom prst="rect">
             <a:avLst/>
@@ -30819,8 +30819,8 @@
         </p:nvSpPr>
         <p:spPr>
           <a:xfrm>
-            <a:off x="5934455" y="1965960"/>
-            <a:ext cx="1335024" cy="603504"/>
+            <a:off x="5751575" y="1965960"/>
+            <a:ext cx="1243584" cy="603504"/>
           </a:xfrm>
           <a:prstGeom prst="rect">
             <a:avLst/>
@@ -30866,8 +30866,8 @@
         </p:nvSpPr>
         <p:spPr>
           <a:xfrm>
-            <a:off x="7360919" y="1965960"/>
-            <a:ext cx="1554480" cy="603504"/>
+            <a:off x="7086600" y="1965960"/>
+            <a:ext cx="1463040" cy="603504"/>
           </a:xfrm>
           <a:prstGeom prst="rect">
             <a:avLst/>
@@ -30912,8 +30912,8 @@
         </p:nvSpPr>
         <p:spPr>
           <a:xfrm>
-            <a:off x="7488936" y="1965960"/>
-            <a:ext cx="1335024" cy="603504"/>
+            <a:off x="7214616" y="1965960"/>
+            <a:ext cx="1243584" cy="603504"/>
           </a:xfrm>
           <a:prstGeom prst="rect">
             <a:avLst/>
@@ -30959,8 +30959,8 @@
         </p:nvSpPr>
         <p:spPr>
           <a:xfrm>
-            <a:off x="8915399" y="1965960"/>
-            <a:ext cx="3291840" cy="603504"/>
+            <a:off x="8549640" y="1965960"/>
+            <a:ext cx="3108960" cy="603504"/>
           </a:xfrm>
           <a:prstGeom prst="rect">
             <a:avLst/>
@@ -31005,8 +31005,8 @@
         </p:nvSpPr>
         <p:spPr>
           <a:xfrm>
-            <a:off x="9043415" y="1965960"/>
-            <a:ext cx="3072384" cy="603504"/>
+            <a:off x="8677656" y="1965960"/>
+            <a:ext cx="2889504" cy="603504"/>
           </a:xfrm>
           <a:prstGeom prst="rect">
             <a:avLst/>
@@ -31053,7 +31053,7 @@
         <p:spPr>
           <a:xfrm>
             <a:off x="868680" y="2569464"/>
-            <a:ext cx="3200400" cy="603504"/>
+            <a:ext cx="3108960" cy="603504"/>
           </a:xfrm>
           <a:prstGeom prst="rect">
             <a:avLst/>
@@ -31099,7 +31099,7 @@
         <p:spPr>
           <a:xfrm>
             <a:off x="996695" y="2569464"/>
-            <a:ext cx="2980944" cy="603504"/>
+            <a:ext cx="2889504" cy="603504"/>
           </a:xfrm>
           <a:prstGeom prst="rect">
             <a:avLst/>
@@ -31145,8 +31145,8 @@
         </p:nvSpPr>
         <p:spPr>
           <a:xfrm>
-            <a:off x="4069080" y="2569464"/>
-            <a:ext cx="1737360" cy="603504"/>
+            <a:off x="3977639" y="2569464"/>
+            <a:ext cx="1645920" cy="603504"/>
           </a:xfrm>
           <a:prstGeom prst="rect">
             <a:avLst/>
@@ -31191,8 +31191,8 @@
         </p:nvSpPr>
         <p:spPr>
           <a:xfrm>
-            <a:off x="4197096" y="2569464"/>
-            <a:ext cx="1517904" cy="603504"/>
+            <a:off x="4105655" y="2569464"/>
+            <a:ext cx="1426464" cy="603504"/>
           </a:xfrm>
           <a:prstGeom prst="rect">
             <a:avLst/>
@@ -31238,8 +31238,8 @@
         </p:nvSpPr>
         <p:spPr>
           <a:xfrm>
-            <a:off x="5806440" y="2569464"/>
-            <a:ext cx="1554480" cy="603504"/>
+            <a:off x="5623559" y="2569464"/>
+            <a:ext cx="1463040" cy="603504"/>
           </a:xfrm>
           <a:prstGeom prst="rect">
             <a:avLst/>
@@ -31284,8 +31284,8 @@
         </p:nvSpPr>
         <p:spPr>
           <a:xfrm>
-            <a:off x="5934455" y="2569464"/>
-            <a:ext cx="1335024" cy="603504"/>
+            <a:off x="5751575" y="2569464"/>
+            <a:ext cx="1243584" cy="603504"/>
           </a:xfrm>
           <a:prstGeom prst="rect">
             <a:avLst/>
@@ -31331,8 +31331,8 @@
         </p:nvSpPr>
         <p:spPr>
           <a:xfrm>
-            <a:off x="7360919" y="2569464"/>
-            <a:ext cx="1554480" cy="603504"/>
+            <a:off x="7086600" y="2569464"/>
+            <a:ext cx="1463040" cy="603504"/>
           </a:xfrm>
           <a:prstGeom prst="rect">
             <a:avLst/>
@@ -31377,8 +31377,8 @@
         </p:nvSpPr>
         <p:spPr>
           <a:xfrm>
-            <a:off x="7488936" y="2569464"/>
-            <a:ext cx="1335024" cy="603504"/>
+            <a:off x="7214616" y="2569464"/>
+            <a:ext cx="1243584" cy="603504"/>
           </a:xfrm>
           <a:prstGeom prst="rect">
             <a:avLst/>
@@ -31424,8 +31424,8 @@
         </p:nvSpPr>
         <p:spPr>
           <a:xfrm>
-            <a:off x="8915399" y="2569464"/>
-            <a:ext cx="3291840" cy="603504"/>
+            <a:off x="8549640" y="2569464"/>
+            <a:ext cx="3108960" cy="603504"/>
           </a:xfrm>
           <a:prstGeom prst="rect">
             <a:avLst/>
@@ -31470,8 +31470,8 @@
         </p:nvSpPr>
         <p:spPr>
           <a:xfrm>
-            <a:off x="9043415" y="2569464"/>
-            <a:ext cx="3072384" cy="603504"/>
+            <a:off x="8677656" y="2569464"/>
+            <a:ext cx="2889504" cy="603504"/>
           </a:xfrm>
           <a:prstGeom prst="rect">
             <a:avLst/>
@@ -31518,7 +31518,7 @@
         <p:spPr>
           <a:xfrm>
             <a:off x="868680" y="3172968"/>
-            <a:ext cx="3200400" cy="603504"/>
+            <a:ext cx="3108960" cy="603504"/>
           </a:xfrm>
           <a:prstGeom prst="rect">
             <a:avLst/>
@@ -31564,7 +31564,7 @@
         <p:spPr>
           <a:xfrm>
             <a:off x="996695" y="3172968"/>
-            <a:ext cx="2980944" cy="603504"/>
+            <a:ext cx="2889504" cy="603504"/>
           </a:xfrm>
           <a:prstGeom prst="rect">
             <a:avLst/>
@@ -31610,8 +31610,8 @@
         </p:nvSpPr>
         <p:spPr>
           <a:xfrm>
-            <a:off x="4069080" y="3172968"/>
-            <a:ext cx="1737360" cy="603504"/>
+            <a:off x="3977639" y="3172968"/>
+            <a:ext cx="1645920" cy="603504"/>
           </a:xfrm>
           <a:prstGeom prst="rect">
             <a:avLst/>
@@ -31656,8 +31656,8 @@
         </p:nvSpPr>
         <p:spPr>
           <a:xfrm>
-            <a:off x="4197096" y="3172968"/>
-            <a:ext cx="1517904" cy="603504"/>
+            <a:off x="4105655" y="3172968"/>
+            <a:ext cx="1426464" cy="603504"/>
           </a:xfrm>
           <a:prstGeom prst="rect">
             <a:avLst/>
@@ -31703,8 +31703,8 @@
         </p:nvSpPr>
         <p:spPr>
           <a:xfrm>
-            <a:off x="5806440" y="3172968"/>
-            <a:ext cx="1554480" cy="603504"/>
+            <a:off x="5623559" y="3172968"/>
+            <a:ext cx="1463040" cy="603504"/>
           </a:xfrm>
           <a:prstGeom prst="rect">
             <a:avLst/>
@@ -31749,8 +31749,8 @@
         </p:nvSpPr>
         <p:spPr>
           <a:xfrm>
-            <a:off x="5934455" y="3172968"/>
-            <a:ext cx="1335024" cy="603504"/>
+            <a:off x="5751575" y="3172968"/>
+            <a:ext cx="1243584" cy="603504"/>
           </a:xfrm>
           <a:prstGeom prst="rect">
             <a:avLst/>
@@ -31796,8 +31796,8 @@
         </p:nvSpPr>
         <p:spPr>
           <a:xfrm>
-            <a:off x="7360919" y="3172968"/>
-            <a:ext cx="1554480" cy="603504"/>
+            <a:off x="7086600" y="3172968"/>
+            <a:ext cx="1463040" cy="603504"/>
           </a:xfrm>
           <a:prstGeom prst="rect">
             <a:avLst/>
@@ -31842,8 +31842,8 @@
         </p:nvSpPr>
         <p:spPr>
           <a:xfrm>
-            <a:off x="7488936" y="3172968"/>
-            <a:ext cx="1335024" cy="603504"/>
+            <a:off x="7214616" y="3172968"/>
+            <a:ext cx="1243584" cy="603504"/>
           </a:xfrm>
           <a:prstGeom prst="rect">
             <a:avLst/>
@@ -31889,8 +31889,8 @@
         </p:nvSpPr>
         <p:spPr>
           <a:xfrm>
-            <a:off x="8915399" y="3172968"/>
-            <a:ext cx="3291840" cy="603504"/>
+            <a:off x="8549640" y="3172968"/>
+            <a:ext cx="3108960" cy="603504"/>
           </a:xfrm>
           <a:prstGeom prst="rect">
             <a:avLst/>
@@ -31935,8 +31935,8 @@
         </p:nvSpPr>
         <p:spPr>
           <a:xfrm>
-            <a:off x="9043415" y="3172968"/>
-            <a:ext cx="3072384" cy="603504"/>
+            <a:off x="8677656" y="3172968"/>
+            <a:ext cx="2889504" cy="603504"/>
           </a:xfrm>
           <a:prstGeom prst="rect">
             <a:avLst/>
@@ -31983,7 +31983,7 @@
         <p:spPr>
           <a:xfrm>
             <a:off x="868680" y="3776472"/>
-            <a:ext cx="3200400" cy="603504"/>
+            <a:ext cx="3108960" cy="603504"/>
           </a:xfrm>
           <a:prstGeom prst="rect">
             <a:avLst/>
@@ -32029,7 +32029,7 @@
         <p:spPr>
           <a:xfrm>
             <a:off x="996695" y="3776472"/>
-            <a:ext cx="2980944" cy="603504"/>
+            <a:ext cx="2889504" cy="603504"/>
           </a:xfrm>
           <a:prstGeom prst="rect">
             <a:avLst/>
@@ -32075,8 +32075,8 @@
         </p:nvSpPr>
         <p:spPr>
           <a:xfrm>
-            <a:off x="4069080" y="3776472"/>
-            <a:ext cx="1737360" cy="603504"/>
+            <a:off x="3977639" y="3776472"/>
+            <a:ext cx="1645920" cy="603504"/>
           </a:xfrm>
           <a:prstGeom prst="rect">
             <a:avLst/>
@@ -32121,8 +32121,8 @@
         </p:nvSpPr>
         <p:spPr>
           <a:xfrm>
-            <a:off x="4197096" y="3776472"/>
-            <a:ext cx="1517904" cy="603504"/>
+            <a:off x="4105655" y="3776472"/>
+            <a:ext cx="1426464" cy="603504"/>
           </a:xfrm>
           <a:prstGeom prst="rect">
             <a:avLst/>
@@ -32168,8 +32168,8 @@
         </p:nvSpPr>
         <p:spPr>
           <a:xfrm>
-            <a:off x="5806440" y="3776472"/>
-            <a:ext cx="1554480" cy="603504"/>
+            <a:off x="5623559" y="3776472"/>
+            <a:ext cx="1463040" cy="603504"/>
           </a:xfrm>
           <a:prstGeom prst="rect">
             <a:avLst/>
@@ -32214,8 +32214,8 @@
         </p:nvSpPr>
         <p:spPr>
           <a:xfrm>
-            <a:off x="5934455" y="3776472"/>
-            <a:ext cx="1335024" cy="603504"/>
+            <a:off x="5751575" y="3776472"/>
+            <a:ext cx="1243584" cy="603504"/>
           </a:xfrm>
           <a:prstGeom prst="rect">
             <a:avLst/>
@@ -32261,8 +32261,8 @@
         </p:nvSpPr>
         <p:spPr>
           <a:xfrm>
-            <a:off x="7360919" y="3776472"/>
-            <a:ext cx="1554480" cy="603504"/>
+            <a:off x="7086600" y="3776472"/>
+            <a:ext cx="1463040" cy="603504"/>
           </a:xfrm>
           <a:prstGeom prst="rect">
             <a:avLst/>
@@ -32307,8 +32307,8 @@
         </p:nvSpPr>
         <p:spPr>
           <a:xfrm>
-            <a:off x="7488936" y="3776472"/>
-            <a:ext cx="1335024" cy="603504"/>
+            <a:off x="7214616" y="3776472"/>
+            <a:ext cx="1243584" cy="603504"/>
           </a:xfrm>
           <a:prstGeom prst="rect">
             <a:avLst/>
@@ -32354,8 +32354,8 @@
         </p:nvSpPr>
         <p:spPr>
           <a:xfrm>
-            <a:off x="8915399" y="3776472"/>
-            <a:ext cx="3291840" cy="603504"/>
+            <a:off x="8549640" y="3776472"/>
+            <a:ext cx="3108960" cy="603504"/>
           </a:xfrm>
           <a:prstGeom prst="rect">
             <a:avLst/>
@@ -32400,8 +32400,8 @@
         </p:nvSpPr>
         <p:spPr>
           <a:xfrm>
-            <a:off x="9043415" y="3776472"/>
-            <a:ext cx="3072384" cy="603504"/>
+            <a:off x="8677656" y="3776472"/>
+            <a:ext cx="2889504" cy="603504"/>
           </a:xfrm>
           <a:prstGeom prst="rect">
             <a:avLst/>
@@ -32434,7 +32434,7 @@
                 <a:ea typeface="GenEi M Gothic v2 Bold"/>
                 <a:cs typeface="GenEi M Gothic v2 Bold"/>
               </a:rPr>
-              <a:t>ベースと互角・数学はSC@9と互角</a:t>
+              <a:t>ベースと互角・数学は差なし</a:t>
             </a:r>
           </a:p>
         </p:txBody>
@@ -32481,7 +32481,7 @@
                 <a:ea typeface="GenEi M Gothic v2 Regular"/>
                 <a:cs typeface="GenEi M Gothic v2 Regular"/>
               </a:rPr>
-              <a:t>・数学（MATH-500）では、LoRAチームと多数決9回は統計的に互角（差 −0.7点, 有意差なし）。</a:t>
+              <a:t>・数学（MATH-500）では差は検出されず（−0.8点, 有意差なし。±2点の同等性は未確定）。</a:t>
             </a:r>
           </a:p>
           <a:p>
@@ -32551,7 +32551,7 @@
                 <a:ea typeface="GenEi M Gothic v2 Regular"/>
                 <a:cs typeface="GenEi M Gothic v2 Regular"/>
               </a:rPr>
-              <a:t>・多数決9回とベース／LoRAチームは6シード、素の議論などの補助条件は3シードで測定。</a:t>
+              <a:t>・多数決9回とLoRAチームは6シード、ベース単体・素の議論などは3シードで測定。</a:t>
             </a:r>
           </a:p>
         </p:txBody>
